--- a/slides/02 - E2 - Cassandra Intro.pptx
+++ b/slides/02 - E2 - Cassandra Intro.pptx
@@ -5,7 +5,7 @@
     <p:sldMasterId id="2147483793" r:id="rId1"/>
   </p:sldMasterIdLst>
   <p:notesMasterIdLst>
-    <p:notesMasterId r:id="rId59"/>
+    <p:notesMasterId r:id="rId60"/>
   </p:notesMasterIdLst>
   <p:sldIdLst>
     <p:sldId id="256" r:id="rId2"/>
@@ -65,6 +65,7 @@
     <p:sldId id="327" r:id="rId56"/>
     <p:sldId id="293" r:id="rId57"/>
     <p:sldId id="299" r:id="rId58"/>
+    <p:sldId id="335" r:id="rId59"/>
   </p:sldIdLst>
   <p:sldSz cx="9144000" cy="6858000" type="screen4x3"/>
   <p:notesSz cx="6858000" cy="9144000"/>
@@ -268,7 +269,7 @@
           <a:p>
             <a:fld id="{8C81D565-392B-4AB9-9647-420EF17AA3FC}" type="datetimeFigureOut">
               <a:rPr lang="it-IT" smtClean="0"/>
-              <a:t>17/02/2023</a:t>
+              <a:t>24/02/2025</a:t>
             </a:fld>
             <a:endParaRPr lang="it-IT" dirty="0"/>
           </a:p>
@@ -691,15 +692,7 @@
           <a:p>
             <a:r>
               <a:rPr lang="it-IT" dirty="0"/>
-              <a:t>Punto di partenza: ho un file </a:t>
-            </a:r>
-            <a:r>
-              <a:rPr lang="it-IT" dirty="0" err="1"/>
-              <a:t>csv</a:t>
-            </a:r>
-            <a:r>
-              <a:rPr lang="it-IT" dirty="0"/>
-              <a:t> con </a:t>
+              <a:t>Di default ordine ASC</a:t>
             </a:r>
           </a:p>
         </p:txBody>
@@ -711,7 +704,7 @@
             <a:spLocks noGrp="1"/>
           </p:cNvSpPr>
           <p:nvPr>
-            <p:ph type="sldNum" sz="quarter" idx="10"/>
+            <p:ph type="sldNum" sz="quarter" idx="5"/>
           </p:nvPr>
         </p:nvSpPr>
         <p:spPr/>
@@ -721,7 +714,7 @@
           <a:p>
             <a:fld id="{B38CEA09-33FA-4F6C-9D30-5FB0AA0E11C3}" type="slidenum">
               <a:rPr lang="it-IT" smtClean="0"/>
-              <a:t>28</a:t>
+              <a:t>24</a:t>
             </a:fld>
             <a:endParaRPr lang="it-IT" dirty="0"/>
           </a:p>
@@ -730,7 +723,7 @@
     </p:spTree>
     <p:extLst>
       <p:ext uri="{BB962C8B-B14F-4D97-AF65-F5344CB8AC3E}">
-        <p14:creationId xmlns:p14="http://schemas.microsoft.com/office/powerpoint/2010/main" val="1763239004"/>
+        <p14:creationId xmlns:p14="http://schemas.microsoft.com/office/powerpoint/2010/main" val="1735177409"/>
       </p:ext>
     </p:extLst>
   </p:cSld>
@@ -785,42 +778,17 @@
           <a:lstStyle/>
           <a:p>
             <a:r>
-              <a:rPr lang="en-US" dirty="0"/>
-              <a:t>DESCRIBE TABLE</a:t>
-            </a:r>
-            <a:r>
-              <a:rPr lang="en-US" baseline="0" dirty="0"/>
-              <a:t> -&gt; </a:t>
-            </a:r>
-            <a:r>
-              <a:rPr lang="en-US" baseline="0" dirty="0" err="1"/>
-              <a:t>notare</a:t>
-            </a:r>
-            <a:r>
-              <a:rPr lang="en-US" baseline="0" dirty="0"/>
-              <a:t> </a:t>
-            </a:r>
-            <a:r>
-              <a:rPr lang="en-US" baseline="0" dirty="0" err="1"/>
-              <a:t>l'ordine</a:t>
-            </a:r>
-            <a:r>
-              <a:rPr lang="en-US" baseline="0" dirty="0"/>
-              <a:t> </a:t>
-            </a:r>
-            <a:r>
-              <a:rPr lang="en-US" baseline="0" dirty="0" err="1"/>
-              <a:t>delle</a:t>
-            </a:r>
-            <a:r>
-              <a:rPr lang="en-US" baseline="0" dirty="0"/>
-              <a:t> </a:t>
-            </a:r>
-            <a:r>
-              <a:rPr lang="en-US" baseline="0" dirty="0" err="1"/>
-              <a:t>colonne</a:t>
-            </a:r>
-            <a:endParaRPr lang="en-US" dirty="0"/>
+              <a:rPr lang="it-IT" dirty="0"/>
+              <a:t>Punto di partenza: ho un file </a:t>
+            </a:r>
+            <a:r>
+              <a:rPr lang="it-IT" dirty="0" err="1"/>
+              <a:t>csv</a:t>
+            </a:r>
+            <a:r>
+              <a:rPr lang="it-IT" dirty="0"/>
+              <a:t> con </a:t>
+            </a:r>
           </a:p>
         </p:txBody>
       </p:sp>
@@ -841,7 +809,7 @@
           <a:p>
             <a:fld id="{B38CEA09-33FA-4F6C-9D30-5FB0AA0E11C3}" type="slidenum">
               <a:rPr lang="it-IT" smtClean="0"/>
-              <a:t>29</a:t>
+              <a:t>27</a:t>
             </a:fld>
             <a:endParaRPr lang="it-IT" dirty="0"/>
           </a:p>
@@ -850,7 +818,7 @@
     </p:spTree>
     <p:extLst>
       <p:ext uri="{BB962C8B-B14F-4D97-AF65-F5344CB8AC3E}">
-        <p14:creationId xmlns:p14="http://schemas.microsoft.com/office/powerpoint/2010/main" val="2128317767"/>
+        <p14:creationId xmlns:p14="http://schemas.microsoft.com/office/powerpoint/2010/main" val="3749314019"/>
       </p:ext>
     </p:extLst>
   </p:cSld>
@@ -905,124 +873,17 @@
           <a:lstStyle/>
           <a:p>
             <a:r>
-              <a:rPr lang="en-US" dirty="0"/>
-              <a:t>DESCRIBE TABLE</a:t>
-            </a:r>
-            <a:r>
-              <a:rPr lang="en-US" baseline="0" dirty="0"/>
-              <a:t> -&gt; </a:t>
-            </a:r>
-            <a:r>
-              <a:rPr lang="en-US" baseline="0" dirty="0" err="1"/>
-              <a:t>notare</a:t>
-            </a:r>
-            <a:r>
-              <a:rPr lang="en-US" baseline="0" dirty="0"/>
-              <a:t> </a:t>
-            </a:r>
-            <a:r>
-              <a:rPr lang="en-US" baseline="0" dirty="0" err="1"/>
-              <a:t>l'ordine</a:t>
-            </a:r>
-            <a:r>
-              <a:rPr lang="en-US" baseline="0" dirty="0"/>
-              <a:t> </a:t>
-            </a:r>
-            <a:r>
-              <a:rPr lang="en-US" baseline="0" dirty="0" err="1"/>
-              <a:t>delle</a:t>
-            </a:r>
-            <a:r>
-              <a:rPr lang="en-US" baseline="0" dirty="0"/>
-              <a:t> </a:t>
-            </a:r>
-            <a:r>
-              <a:rPr lang="en-US" baseline="0" dirty="0" err="1"/>
-              <a:t>colonne</a:t>
-            </a:r>
-            <a:endParaRPr lang="en-US" baseline="0" dirty="0"/>
-          </a:p>
-          <a:p>
-            <a:endParaRPr lang="en-US" baseline="0" dirty="0"/>
-          </a:p>
-          <a:p>
-            <a:r>
-              <a:rPr lang="en-US" baseline="0" dirty="0"/>
-              <a:t>(</a:t>
-            </a:r>
-            <a:r>
-              <a:rPr lang="en-US" baseline="0" dirty="0" err="1"/>
-              <a:t>perchè</a:t>
-            </a:r>
-            <a:r>
-              <a:rPr lang="en-US" baseline="0" dirty="0"/>
-              <a:t> TAG come </a:t>
-            </a:r>
-            <a:r>
-              <a:rPr lang="en-US" baseline="0" dirty="0" err="1"/>
-              <a:t>partizionamento</a:t>
-            </a:r>
-            <a:r>
-              <a:rPr lang="en-US" baseline="0" dirty="0"/>
-              <a:t> e non </a:t>
-            </a:r>
-            <a:r>
-              <a:rPr lang="en-US" baseline="0" dirty="0" err="1"/>
-              <a:t>anche</a:t>
-            </a:r>
-            <a:r>
-              <a:rPr lang="en-US" baseline="0" dirty="0"/>
-              <a:t> </a:t>
-            </a:r>
-            <a:r>
-              <a:rPr lang="en-US" baseline="0" dirty="0" err="1"/>
-              <a:t>video_id</a:t>
-            </a:r>
-            <a:r>
-              <a:rPr lang="en-US" baseline="0" dirty="0"/>
-              <a:t>? </a:t>
-            </a:r>
-            <a:r>
-              <a:rPr lang="en-US" baseline="0" dirty="0" err="1"/>
-              <a:t>Video_id</a:t>
-            </a:r>
-            <a:r>
-              <a:rPr lang="en-US" baseline="0" dirty="0"/>
-              <a:t> poi </a:t>
-            </a:r>
-            <a:r>
-              <a:rPr lang="en-US" baseline="0" dirty="0" err="1"/>
-              <a:t>crea</a:t>
-            </a:r>
-            <a:r>
-              <a:rPr lang="en-US" baseline="0" dirty="0"/>
-              <a:t> </a:t>
-            </a:r>
-            <a:r>
-              <a:rPr lang="en-US" baseline="0" dirty="0" err="1"/>
-              <a:t>gruppi</a:t>
-            </a:r>
-            <a:r>
-              <a:rPr lang="en-US" baseline="0" dirty="0"/>
-              <a:t> </a:t>
-            </a:r>
-            <a:r>
-              <a:rPr lang="en-US" baseline="0" dirty="0" err="1"/>
-              <a:t>più</a:t>
-            </a:r>
-            <a:r>
-              <a:rPr lang="en-US" baseline="0" dirty="0"/>
-              <a:t> </a:t>
-            </a:r>
-            <a:r>
-              <a:rPr lang="en-US" baseline="0" dirty="0" err="1"/>
-              <a:t>piccoli</a:t>
-            </a:r>
-            <a:r>
-              <a:rPr lang="en-US" baseline="0" dirty="0"/>
-              <a:t>..)</a:t>
-            </a:r>
-            <a:endParaRPr lang="en-US" dirty="0"/>
+              <a:rPr lang="it-IT" dirty="0"/>
+              <a:t>Punto di partenza: ho un file </a:t>
+            </a:r>
+            <a:r>
+              <a:rPr lang="it-IT" dirty="0" err="1"/>
+              <a:t>csv</a:t>
+            </a:r>
+            <a:r>
+              <a:rPr lang="it-IT" dirty="0"/>
+              <a:t> con </a:t>
+            </a:r>
           </a:p>
         </p:txBody>
       </p:sp>
@@ -1043,7 +904,7 @@
           <a:p>
             <a:fld id="{B38CEA09-33FA-4F6C-9D30-5FB0AA0E11C3}" type="slidenum">
               <a:rPr lang="it-IT" smtClean="0"/>
-              <a:t>30</a:t>
+              <a:t>28</a:t>
             </a:fld>
             <a:endParaRPr lang="it-IT" dirty="0"/>
           </a:p>
@@ -1052,7 +913,7 @@
     </p:spTree>
     <p:extLst>
       <p:ext uri="{BB962C8B-B14F-4D97-AF65-F5344CB8AC3E}">
-        <p14:creationId xmlns:p14="http://schemas.microsoft.com/office/powerpoint/2010/main" val="199411169"/>
+        <p14:creationId xmlns:p14="http://schemas.microsoft.com/office/powerpoint/2010/main" val="1763239004"/>
       </p:ext>
     </p:extLst>
   </p:cSld>
@@ -1107,9 +968,42 @@
           <a:lstStyle/>
           <a:p>
             <a:r>
-              <a:rPr lang="it-IT" dirty="0"/>
-              <a:t>La penultima non va</a:t>
-            </a:r>
+              <a:rPr lang="en-US" dirty="0"/>
+              <a:t>DESCRIBE TABLE</a:t>
+            </a:r>
+            <a:r>
+              <a:rPr lang="en-US" baseline="0" dirty="0"/>
+              <a:t> -&gt; </a:t>
+            </a:r>
+            <a:r>
+              <a:rPr lang="en-US" baseline="0" dirty="0" err="1"/>
+              <a:t>notare</a:t>
+            </a:r>
+            <a:r>
+              <a:rPr lang="en-US" baseline="0" dirty="0"/>
+              <a:t> </a:t>
+            </a:r>
+            <a:r>
+              <a:rPr lang="en-US" baseline="0" dirty="0" err="1"/>
+              <a:t>l'ordine</a:t>
+            </a:r>
+            <a:r>
+              <a:rPr lang="en-US" baseline="0" dirty="0"/>
+              <a:t> </a:t>
+            </a:r>
+            <a:r>
+              <a:rPr lang="en-US" baseline="0" dirty="0" err="1"/>
+              <a:t>delle</a:t>
+            </a:r>
+            <a:r>
+              <a:rPr lang="en-US" baseline="0" dirty="0"/>
+              <a:t> </a:t>
+            </a:r>
+            <a:r>
+              <a:rPr lang="en-US" baseline="0" dirty="0" err="1"/>
+              <a:t>colonne</a:t>
+            </a:r>
+            <a:endParaRPr lang="en-US" dirty="0"/>
           </a:p>
         </p:txBody>
       </p:sp>
@@ -1120,7 +1014,7 @@
             <a:spLocks noGrp="1"/>
           </p:cNvSpPr>
           <p:nvPr>
-            <p:ph type="sldNum" sz="quarter" idx="5"/>
+            <p:ph type="sldNum" sz="quarter" idx="10"/>
           </p:nvPr>
         </p:nvSpPr>
         <p:spPr/>
@@ -1130,7 +1024,7 @@
           <a:p>
             <a:fld id="{B38CEA09-33FA-4F6C-9D30-5FB0AA0E11C3}" type="slidenum">
               <a:rPr lang="it-IT" smtClean="0"/>
-              <a:t>31</a:t>
+              <a:t>29</a:t>
             </a:fld>
             <a:endParaRPr lang="it-IT" dirty="0"/>
           </a:p>
@@ -1139,7 +1033,7 @@
     </p:spTree>
     <p:extLst>
       <p:ext uri="{BB962C8B-B14F-4D97-AF65-F5344CB8AC3E}">
-        <p14:creationId xmlns:p14="http://schemas.microsoft.com/office/powerpoint/2010/main" val="2620812623"/>
+        <p14:creationId xmlns:p14="http://schemas.microsoft.com/office/powerpoint/2010/main" val="2128317767"/>
       </p:ext>
     </p:extLst>
   </p:cSld>
@@ -1193,6 +1087,124 @@
           <a:bodyPr/>
           <a:lstStyle/>
           <a:p>
+            <a:r>
+              <a:rPr lang="en-US" dirty="0"/>
+              <a:t>DESCRIBE TABLE</a:t>
+            </a:r>
+            <a:r>
+              <a:rPr lang="en-US" baseline="0" dirty="0"/>
+              <a:t> -&gt; </a:t>
+            </a:r>
+            <a:r>
+              <a:rPr lang="en-US" baseline="0" dirty="0" err="1"/>
+              <a:t>notare</a:t>
+            </a:r>
+            <a:r>
+              <a:rPr lang="en-US" baseline="0" dirty="0"/>
+              <a:t> </a:t>
+            </a:r>
+            <a:r>
+              <a:rPr lang="en-US" baseline="0" dirty="0" err="1"/>
+              <a:t>l'ordine</a:t>
+            </a:r>
+            <a:r>
+              <a:rPr lang="en-US" baseline="0" dirty="0"/>
+              <a:t> </a:t>
+            </a:r>
+            <a:r>
+              <a:rPr lang="en-US" baseline="0" dirty="0" err="1"/>
+              <a:t>delle</a:t>
+            </a:r>
+            <a:r>
+              <a:rPr lang="en-US" baseline="0" dirty="0"/>
+              <a:t> </a:t>
+            </a:r>
+            <a:r>
+              <a:rPr lang="en-US" baseline="0" dirty="0" err="1"/>
+              <a:t>colonne</a:t>
+            </a:r>
+            <a:endParaRPr lang="en-US" baseline="0" dirty="0"/>
+          </a:p>
+          <a:p>
+            <a:endParaRPr lang="en-US" baseline="0" dirty="0"/>
+          </a:p>
+          <a:p>
+            <a:r>
+              <a:rPr lang="en-US" baseline="0" dirty="0"/>
+              <a:t>(</a:t>
+            </a:r>
+            <a:r>
+              <a:rPr lang="en-US" baseline="0" dirty="0" err="1"/>
+              <a:t>perchè</a:t>
+            </a:r>
+            <a:r>
+              <a:rPr lang="en-US" baseline="0" dirty="0"/>
+              <a:t> TAG come </a:t>
+            </a:r>
+            <a:r>
+              <a:rPr lang="en-US" baseline="0" dirty="0" err="1"/>
+              <a:t>partizionamento</a:t>
+            </a:r>
+            <a:r>
+              <a:rPr lang="en-US" baseline="0" dirty="0"/>
+              <a:t> e non </a:t>
+            </a:r>
+            <a:r>
+              <a:rPr lang="en-US" baseline="0" dirty="0" err="1"/>
+              <a:t>anche</a:t>
+            </a:r>
+            <a:r>
+              <a:rPr lang="en-US" baseline="0" dirty="0"/>
+              <a:t> </a:t>
+            </a:r>
+            <a:r>
+              <a:rPr lang="en-US" baseline="0" dirty="0" err="1"/>
+              <a:t>video_id</a:t>
+            </a:r>
+            <a:r>
+              <a:rPr lang="en-US" baseline="0" dirty="0"/>
+              <a:t>? </a:t>
+            </a:r>
+            <a:r>
+              <a:rPr lang="en-US" baseline="0" dirty="0" err="1"/>
+              <a:t>Video_id</a:t>
+            </a:r>
+            <a:r>
+              <a:rPr lang="en-US" baseline="0" dirty="0"/>
+              <a:t> poi </a:t>
+            </a:r>
+            <a:r>
+              <a:rPr lang="en-US" baseline="0" dirty="0" err="1"/>
+              <a:t>crea</a:t>
+            </a:r>
+            <a:r>
+              <a:rPr lang="en-US" baseline="0" dirty="0"/>
+              <a:t> </a:t>
+            </a:r>
+            <a:r>
+              <a:rPr lang="en-US" baseline="0" dirty="0" err="1"/>
+              <a:t>gruppi</a:t>
+            </a:r>
+            <a:r>
+              <a:rPr lang="en-US" baseline="0" dirty="0"/>
+              <a:t> </a:t>
+            </a:r>
+            <a:r>
+              <a:rPr lang="en-US" baseline="0" dirty="0" err="1"/>
+              <a:t>più</a:t>
+            </a:r>
+            <a:r>
+              <a:rPr lang="en-US" baseline="0" dirty="0"/>
+              <a:t> </a:t>
+            </a:r>
+            <a:r>
+              <a:rPr lang="en-US" baseline="0" dirty="0" err="1"/>
+              <a:t>piccoli</a:t>
+            </a:r>
+            <a:r>
+              <a:rPr lang="en-US" baseline="0" dirty="0"/>
+              <a:t>..)</a:t>
+            </a:r>
             <a:endParaRPr lang="en-US" dirty="0"/>
           </a:p>
         </p:txBody>
@@ -1214,7 +1226,7 @@
           <a:p>
             <a:fld id="{B38CEA09-33FA-4F6C-9D30-5FB0AA0E11C3}" type="slidenum">
               <a:rPr lang="it-IT" smtClean="0"/>
-              <a:t>42</a:t>
+              <a:t>30</a:t>
             </a:fld>
             <a:endParaRPr lang="it-IT" dirty="0"/>
           </a:p>
@@ -1223,7 +1235,7 @@
     </p:spTree>
     <p:extLst>
       <p:ext uri="{BB962C8B-B14F-4D97-AF65-F5344CB8AC3E}">
-        <p14:creationId xmlns:p14="http://schemas.microsoft.com/office/powerpoint/2010/main" val="134689389"/>
+        <p14:creationId xmlns:p14="http://schemas.microsoft.com/office/powerpoint/2010/main" val="199411169"/>
       </p:ext>
     </p:extLst>
   </p:cSld>
@@ -1278,137 +1290,9 @@
           <a:lstStyle/>
           <a:p>
             <a:r>
-              <a:rPr lang="en-US" dirty="0" err="1"/>
-              <a:t>Attenzione</a:t>
-            </a:r>
-            <a:r>
-              <a:rPr lang="en-US" dirty="0"/>
-              <a:t>! </a:t>
-            </a:r>
-            <a:r>
-              <a:rPr lang="en-US" dirty="0" err="1"/>
-              <a:t>Nel</a:t>
-            </a:r>
-            <a:r>
-              <a:rPr lang="en-US" dirty="0"/>
-              <a:t> </a:t>
-            </a:r>
-            <a:r>
-              <a:rPr lang="en-US" dirty="0" err="1"/>
-              <a:t>corso</a:t>
-            </a:r>
-            <a:r>
-              <a:rPr lang="en-US" dirty="0"/>
-              <a:t> di </a:t>
-            </a:r>
-            <a:r>
-              <a:rPr lang="en-US" dirty="0" err="1"/>
-              <a:t>riferimento</a:t>
-            </a:r>
-            <a:r>
-              <a:rPr lang="en-US" dirty="0"/>
-              <a:t> (DS220) </a:t>
-            </a:r>
-            <a:r>
-              <a:rPr lang="en-US" dirty="0" err="1"/>
-              <a:t>viene</a:t>
-            </a:r>
-            <a:r>
-              <a:rPr lang="en-US" dirty="0"/>
-              <a:t> </a:t>
-            </a:r>
-            <a:r>
-              <a:rPr lang="en-US" dirty="0" err="1"/>
-              <a:t>detta</a:t>
-            </a:r>
-            <a:r>
-              <a:rPr lang="en-US" dirty="0"/>
-              <a:t> </a:t>
-            </a:r>
-            <a:r>
-              <a:rPr lang="en-US" dirty="0" err="1"/>
-              <a:t>una</a:t>
-            </a:r>
-            <a:r>
-              <a:rPr lang="en-US" dirty="0"/>
-              <a:t> </a:t>
-            </a:r>
-            <a:r>
-              <a:rPr lang="en-US" dirty="0" err="1"/>
-              <a:t>cosa</a:t>
-            </a:r>
-            <a:r>
-              <a:rPr lang="en-US" dirty="0"/>
-              <a:t> </a:t>
-            </a:r>
-            <a:r>
-              <a:rPr lang="en-US" dirty="0" err="1"/>
-              <a:t>profondamente</a:t>
-            </a:r>
-            <a:r>
-              <a:rPr lang="en-US" dirty="0"/>
-              <a:t> </a:t>
-            </a:r>
-            <a:r>
-              <a:rPr lang="en-US" dirty="0" err="1"/>
-              <a:t>sbagliata</a:t>
-            </a:r>
-            <a:r>
-              <a:rPr lang="en-US" dirty="0"/>
-              <a:t>, </a:t>
-            </a:r>
-            <a:r>
-              <a:rPr lang="en-US" dirty="0" err="1"/>
-              <a:t>ossia</a:t>
-            </a:r>
-            <a:r>
-              <a:rPr lang="en-US" baseline="0" dirty="0"/>
-              <a:t> </a:t>
-            </a:r>
-            <a:r>
-              <a:rPr lang="en-US" baseline="0" dirty="0" err="1"/>
-              <a:t>che</a:t>
-            </a:r>
-            <a:r>
-              <a:rPr lang="en-US" baseline="0" dirty="0"/>
-              <a:t> </a:t>
-            </a:r>
-            <a:r>
-              <a:rPr lang="en-US" baseline="0" dirty="0" err="1"/>
-              <a:t>il</a:t>
-            </a:r>
-            <a:r>
-              <a:rPr lang="en-US" baseline="0" dirty="0"/>
-              <a:t> DBMS prima fa </a:t>
-            </a:r>
-            <a:r>
-              <a:rPr lang="en-US" baseline="0" dirty="0" err="1"/>
-              <a:t>il</a:t>
-            </a:r>
-            <a:r>
-              <a:rPr lang="en-US" baseline="0" dirty="0"/>
-              <a:t> join, poi </a:t>
-            </a:r>
-            <a:r>
-              <a:rPr lang="en-US" baseline="0" dirty="0" err="1"/>
-              <a:t>il</a:t>
-            </a:r>
-            <a:r>
-              <a:rPr lang="en-US" baseline="0" dirty="0"/>
-              <a:t> </a:t>
-            </a:r>
-            <a:r>
-              <a:rPr lang="en-US" baseline="0" dirty="0" err="1"/>
-              <a:t>filtro</a:t>
-            </a:r>
-            <a:r>
-              <a:rPr lang="en-US" baseline="0" dirty="0"/>
-              <a:t>. </a:t>
-            </a:r>
-            <a:endParaRPr lang="en-US" dirty="0"/>
-          </a:p>
-          <a:p>
-            <a:endParaRPr lang="en-US" dirty="0"/>
+              <a:rPr lang="it-IT" dirty="0"/>
+              <a:t>La penultima non va</a:t>
+            </a:r>
           </a:p>
         </p:txBody>
       </p:sp>
@@ -1419,7 +1303,7 @@
             <a:spLocks noGrp="1"/>
           </p:cNvSpPr>
           <p:nvPr>
-            <p:ph type="sldNum" sz="quarter" idx="10"/>
+            <p:ph type="sldNum" sz="quarter" idx="5"/>
           </p:nvPr>
         </p:nvSpPr>
         <p:spPr/>
@@ -1429,7 +1313,7 @@
           <a:p>
             <a:fld id="{B38CEA09-33FA-4F6C-9D30-5FB0AA0E11C3}" type="slidenum">
               <a:rPr lang="it-IT" smtClean="0"/>
-              <a:t>47</a:t>
+              <a:t>31</a:t>
             </a:fld>
             <a:endParaRPr lang="it-IT" dirty="0"/>
           </a:p>
@@ -1438,7 +1322,7 @@
     </p:spTree>
     <p:extLst>
       <p:ext uri="{BB962C8B-B14F-4D97-AF65-F5344CB8AC3E}">
-        <p14:creationId xmlns:p14="http://schemas.microsoft.com/office/powerpoint/2010/main" val="3972232593"/>
+        <p14:creationId xmlns:p14="http://schemas.microsoft.com/office/powerpoint/2010/main" val="2620812623"/>
       </p:ext>
     </p:extLst>
   </p:cSld>
@@ -1492,14 +1376,7 @@
           <a:bodyPr/>
           <a:lstStyle/>
           <a:p>
-            <a:r>
-              <a:rPr lang="it-IT" dirty="0"/>
-              <a:t>Video id non è in chiave per non </a:t>
-            </a:r>
-            <a:r>
-              <a:rPr lang="it-IT"/>
-              <a:t>essere ridondanti</a:t>
-            </a:r>
+            <a:endParaRPr lang="en-US" dirty="0"/>
           </a:p>
         </p:txBody>
       </p:sp>
@@ -1510,7 +1387,7 @@
             <a:spLocks noGrp="1"/>
           </p:cNvSpPr>
           <p:nvPr>
-            <p:ph type="sldNum" sz="quarter" idx="5"/>
+            <p:ph type="sldNum" sz="quarter" idx="10"/>
           </p:nvPr>
         </p:nvSpPr>
         <p:spPr/>
@@ -1520,7 +1397,7 @@
           <a:p>
             <a:fld id="{B38CEA09-33FA-4F6C-9D30-5FB0AA0E11C3}" type="slidenum">
               <a:rPr lang="it-IT" smtClean="0"/>
-              <a:t>49</a:t>
+              <a:t>42</a:t>
             </a:fld>
             <a:endParaRPr lang="it-IT" dirty="0"/>
           </a:p>
@@ -1529,7 +1406,7 @@
     </p:spTree>
     <p:extLst>
       <p:ext uri="{BB962C8B-B14F-4D97-AF65-F5344CB8AC3E}">
-        <p14:creationId xmlns:p14="http://schemas.microsoft.com/office/powerpoint/2010/main" val="1518959614"/>
+        <p14:creationId xmlns:p14="http://schemas.microsoft.com/office/powerpoint/2010/main" val="134689389"/>
       </p:ext>
     </p:extLst>
   </p:cSld>
@@ -1584,72 +1461,137 @@
           <a:lstStyle/>
           <a:p>
             <a:r>
-              <a:rPr lang="it-IT" dirty="0"/>
-              <a:t>Oltre alla granularità del video, attenzione al personaggio (</a:t>
-            </a:r>
-            <a:r>
-              <a:rPr lang="it-IT" dirty="0" err="1"/>
-              <a:t>character_name</a:t>
-            </a:r>
-            <a:r>
-              <a:rPr lang="it-IT" dirty="0"/>
-              <a:t>)</a:t>
-            </a:r>
-          </a:p>
-          <a:p>
-            <a:endParaRPr lang="it-IT" dirty="0"/>
-          </a:p>
-          <a:p>
-            <a:r>
-              <a:rPr lang="it-IT" dirty="0"/>
-              <a:t>Clustering </a:t>
-            </a:r>
-            <a:r>
-              <a:rPr lang="it-IT" dirty="0" err="1"/>
-              <a:t>order</a:t>
-            </a:r>
-            <a:r>
-              <a:rPr lang="it-IT" dirty="0"/>
-              <a:t> by </a:t>
-            </a:r>
-            <a:r>
-              <a:rPr lang="it-IT" dirty="0" err="1"/>
-              <a:t>added_date</a:t>
-            </a:r>
-            <a:r>
-              <a:rPr lang="it-IT" dirty="0"/>
-              <a:t> </a:t>
-            </a:r>
-            <a:r>
-              <a:rPr lang="it-IT" dirty="0" err="1"/>
-              <a:t>desc</a:t>
-            </a:r>
-            <a:endParaRPr lang="it-IT" dirty="0"/>
-          </a:p>
-          <a:p>
-            <a:endParaRPr lang="it-IT" dirty="0"/>
-          </a:p>
-          <a:p>
-            <a:r>
-              <a:rPr lang="it-IT" dirty="0"/>
-              <a:t>Ridefinire </a:t>
-            </a:r>
-            <a:r>
-              <a:rPr lang="it-IT" dirty="0" err="1"/>
-              <a:t>type</a:t>
-            </a:r>
-            <a:r>
-              <a:rPr lang="it-IT" dirty="0"/>
-              <a:t> video </a:t>
-            </a:r>
-            <a:r>
-              <a:rPr lang="it-IT" dirty="0" err="1"/>
-              <a:t>encoding</a:t>
-            </a:r>
-            <a:r>
-              <a:rPr lang="it-IT" dirty="0"/>
-              <a:t>.</a:t>
-            </a:r>
+              <a:rPr lang="en-US" dirty="0" err="1"/>
+              <a:t>Attenzione</a:t>
+            </a:r>
+            <a:r>
+              <a:rPr lang="en-US" dirty="0"/>
+              <a:t>! </a:t>
+            </a:r>
+            <a:r>
+              <a:rPr lang="en-US" dirty="0" err="1"/>
+              <a:t>Nel</a:t>
+            </a:r>
+            <a:r>
+              <a:rPr lang="en-US" dirty="0"/>
+              <a:t> </a:t>
+            </a:r>
+            <a:r>
+              <a:rPr lang="en-US" dirty="0" err="1"/>
+              <a:t>corso</a:t>
+            </a:r>
+            <a:r>
+              <a:rPr lang="en-US" dirty="0"/>
+              <a:t> di </a:t>
+            </a:r>
+            <a:r>
+              <a:rPr lang="en-US" dirty="0" err="1"/>
+              <a:t>riferimento</a:t>
+            </a:r>
+            <a:r>
+              <a:rPr lang="en-US" dirty="0"/>
+              <a:t> (DS220) </a:t>
+            </a:r>
+            <a:r>
+              <a:rPr lang="en-US" dirty="0" err="1"/>
+              <a:t>viene</a:t>
+            </a:r>
+            <a:r>
+              <a:rPr lang="en-US" dirty="0"/>
+              <a:t> </a:t>
+            </a:r>
+            <a:r>
+              <a:rPr lang="en-US" dirty="0" err="1"/>
+              <a:t>detta</a:t>
+            </a:r>
+            <a:r>
+              <a:rPr lang="en-US" dirty="0"/>
+              <a:t> </a:t>
+            </a:r>
+            <a:r>
+              <a:rPr lang="en-US" dirty="0" err="1"/>
+              <a:t>una</a:t>
+            </a:r>
+            <a:r>
+              <a:rPr lang="en-US" dirty="0"/>
+              <a:t> </a:t>
+            </a:r>
+            <a:r>
+              <a:rPr lang="en-US" dirty="0" err="1"/>
+              <a:t>cosa</a:t>
+            </a:r>
+            <a:r>
+              <a:rPr lang="en-US" dirty="0"/>
+              <a:t> </a:t>
+            </a:r>
+            <a:r>
+              <a:rPr lang="en-US" dirty="0" err="1"/>
+              <a:t>profondamente</a:t>
+            </a:r>
+            <a:r>
+              <a:rPr lang="en-US" dirty="0"/>
+              <a:t> </a:t>
+            </a:r>
+            <a:r>
+              <a:rPr lang="en-US" dirty="0" err="1"/>
+              <a:t>sbagliata</a:t>
+            </a:r>
+            <a:r>
+              <a:rPr lang="en-US" dirty="0"/>
+              <a:t>, </a:t>
+            </a:r>
+            <a:r>
+              <a:rPr lang="en-US" dirty="0" err="1"/>
+              <a:t>ossia</a:t>
+            </a:r>
+            <a:r>
+              <a:rPr lang="en-US" baseline="0" dirty="0"/>
+              <a:t> </a:t>
+            </a:r>
+            <a:r>
+              <a:rPr lang="en-US" baseline="0" dirty="0" err="1"/>
+              <a:t>che</a:t>
+            </a:r>
+            <a:r>
+              <a:rPr lang="en-US" baseline="0" dirty="0"/>
+              <a:t> </a:t>
+            </a:r>
+            <a:r>
+              <a:rPr lang="en-US" baseline="0" dirty="0" err="1"/>
+              <a:t>il</a:t>
+            </a:r>
+            <a:r>
+              <a:rPr lang="en-US" baseline="0" dirty="0"/>
+              <a:t> DBMS prima fa </a:t>
+            </a:r>
+            <a:r>
+              <a:rPr lang="en-US" baseline="0" dirty="0" err="1"/>
+              <a:t>il</a:t>
+            </a:r>
+            <a:r>
+              <a:rPr lang="en-US" baseline="0" dirty="0"/>
+              <a:t> join, poi </a:t>
+            </a:r>
+            <a:r>
+              <a:rPr lang="en-US" baseline="0" dirty="0" err="1"/>
+              <a:t>il</a:t>
+            </a:r>
+            <a:r>
+              <a:rPr lang="en-US" baseline="0" dirty="0"/>
+              <a:t> </a:t>
+            </a:r>
+            <a:r>
+              <a:rPr lang="en-US" baseline="0" dirty="0" err="1"/>
+              <a:t>filtro</a:t>
+            </a:r>
+            <a:r>
+              <a:rPr lang="en-US" baseline="0" dirty="0"/>
+              <a:t>. </a:t>
+            </a:r>
+            <a:endParaRPr lang="en-US" dirty="0"/>
+          </a:p>
+          <a:p>
+            <a:endParaRPr lang="en-US" dirty="0"/>
           </a:p>
         </p:txBody>
       </p:sp>
@@ -1660,7 +1602,7 @@
             <a:spLocks noGrp="1"/>
           </p:cNvSpPr>
           <p:nvPr>
-            <p:ph type="sldNum" sz="quarter" idx="5"/>
+            <p:ph type="sldNum" sz="quarter" idx="10"/>
           </p:nvPr>
         </p:nvSpPr>
         <p:spPr/>
@@ -1670,7 +1612,7 @@
           <a:p>
             <a:fld id="{B38CEA09-33FA-4F6C-9D30-5FB0AA0E11C3}" type="slidenum">
               <a:rPr lang="it-IT" smtClean="0"/>
-              <a:t>52</a:t>
+              <a:t>47</a:t>
             </a:fld>
             <a:endParaRPr lang="it-IT" dirty="0"/>
           </a:p>
@@ -1679,7 +1621,7 @@
     </p:spTree>
     <p:extLst>
       <p:ext uri="{BB962C8B-B14F-4D97-AF65-F5344CB8AC3E}">
-        <p14:creationId xmlns:p14="http://schemas.microsoft.com/office/powerpoint/2010/main" val="1769719923"/>
+        <p14:creationId xmlns:p14="http://schemas.microsoft.com/office/powerpoint/2010/main" val="3972232593"/>
       </p:ext>
     </p:extLst>
   </p:cSld>
@@ -1735,7 +1677,11 @@
           <a:p>
             <a:r>
               <a:rPr lang="it-IT" dirty="0"/>
-              <a:t>Un attore può avere più ruoli, per quello in chiave di clustering</a:t>
+              <a:t>Video id non è in chiave per non </a:t>
+            </a:r>
+            <a:r>
+              <a:rPr lang="it-IT"/>
+              <a:t>essere ridondanti</a:t>
             </a:r>
           </a:p>
         </p:txBody>
@@ -1757,7 +1703,7 @@
           <a:p>
             <a:fld id="{B38CEA09-33FA-4F6C-9D30-5FB0AA0E11C3}" type="slidenum">
               <a:rPr lang="it-IT" smtClean="0"/>
-              <a:t>53</a:t>
+              <a:t>49</a:t>
             </a:fld>
             <a:endParaRPr lang="it-IT" dirty="0"/>
           </a:p>
@@ -1766,7 +1712,7 @@
     </p:spTree>
     <p:extLst>
       <p:ext uri="{BB962C8B-B14F-4D97-AF65-F5344CB8AC3E}">
-        <p14:creationId xmlns:p14="http://schemas.microsoft.com/office/powerpoint/2010/main" val="1597129680"/>
+        <p14:creationId xmlns:p14="http://schemas.microsoft.com/office/powerpoint/2010/main" val="1518959614"/>
       </p:ext>
     </p:extLst>
   </p:cSld>
@@ -1820,7 +1766,73 @@
           <a:bodyPr/>
           <a:lstStyle/>
           <a:p>
+            <a:r>
+              <a:rPr lang="it-IT" dirty="0"/>
+              <a:t>Oltre alla granularità del video, attenzione al personaggio (</a:t>
+            </a:r>
+            <a:r>
+              <a:rPr lang="it-IT" dirty="0" err="1"/>
+              <a:t>character_name</a:t>
+            </a:r>
+            <a:r>
+              <a:rPr lang="it-IT" dirty="0"/>
+              <a:t>)</a:t>
+            </a:r>
+          </a:p>
+          <a:p>
             <a:endParaRPr lang="it-IT" dirty="0"/>
+          </a:p>
+          <a:p>
+            <a:r>
+              <a:rPr lang="it-IT" dirty="0"/>
+              <a:t>Clustering </a:t>
+            </a:r>
+            <a:r>
+              <a:rPr lang="it-IT" dirty="0" err="1"/>
+              <a:t>order</a:t>
+            </a:r>
+            <a:r>
+              <a:rPr lang="it-IT" dirty="0"/>
+              <a:t> by </a:t>
+            </a:r>
+            <a:r>
+              <a:rPr lang="it-IT" dirty="0" err="1"/>
+              <a:t>added_date</a:t>
+            </a:r>
+            <a:r>
+              <a:rPr lang="it-IT" dirty="0"/>
+              <a:t> </a:t>
+            </a:r>
+            <a:r>
+              <a:rPr lang="it-IT" dirty="0" err="1"/>
+              <a:t>desc</a:t>
+            </a:r>
+            <a:endParaRPr lang="it-IT" dirty="0"/>
+          </a:p>
+          <a:p>
+            <a:endParaRPr lang="it-IT" dirty="0"/>
+          </a:p>
+          <a:p>
+            <a:r>
+              <a:rPr lang="it-IT" dirty="0"/>
+              <a:t>Ridefinire </a:t>
+            </a:r>
+            <a:r>
+              <a:rPr lang="it-IT" dirty="0" err="1"/>
+              <a:t>type</a:t>
+            </a:r>
+            <a:r>
+              <a:rPr lang="it-IT" dirty="0"/>
+              <a:t> video </a:t>
+            </a:r>
+            <a:r>
+              <a:rPr lang="it-IT" dirty="0" err="1"/>
+              <a:t>encoding</a:t>
+            </a:r>
+            <a:r>
+              <a:rPr lang="it-IT" dirty="0"/>
+              <a:t>.</a:t>
+            </a:r>
           </a:p>
         </p:txBody>
       </p:sp>
@@ -1831,7 +1843,7 @@
             <a:spLocks noGrp="1"/>
           </p:cNvSpPr>
           <p:nvPr>
-            <p:ph type="sldNum" sz="quarter" idx="10"/>
+            <p:ph type="sldNum" sz="quarter" idx="5"/>
           </p:nvPr>
         </p:nvSpPr>
         <p:spPr/>
@@ -1841,7 +1853,7 @@
           <a:p>
             <a:fld id="{B38CEA09-33FA-4F6C-9D30-5FB0AA0E11C3}" type="slidenum">
               <a:rPr lang="it-IT" smtClean="0"/>
-              <a:t>55</a:t>
+              <a:t>52</a:t>
             </a:fld>
             <a:endParaRPr lang="it-IT" dirty="0"/>
           </a:p>
@@ -1850,7 +1862,7 @@
     </p:spTree>
     <p:extLst>
       <p:ext uri="{BB962C8B-B14F-4D97-AF65-F5344CB8AC3E}">
-        <p14:creationId xmlns:p14="http://schemas.microsoft.com/office/powerpoint/2010/main" val="4204238383"/>
+        <p14:creationId xmlns:p14="http://schemas.microsoft.com/office/powerpoint/2010/main" val="1769719923"/>
       </p:ext>
     </p:extLst>
   </p:cSld>
@@ -1935,6 +1947,261 @@
     <p:extLst>
       <p:ext uri="{BB962C8B-B14F-4D97-AF65-F5344CB8AC3E}">
         <p14:creationId xmlns:p14="http://schemas.microsoft.com/office/powerpoint/2010/main" val="83716921"/>
+      </p:ext>
+    </p:extLst>
+  </p:cSld>
+  <p:clrMapOvr>
+    <a:masterClrMapping/>
+  </p:clrMapOvr>
+</p:notes>
+</file>
+
+<file path=ppt/notesSlides/notesSlide20.xml><?xml version="1.0" encoding="utf-8"?>
+<p:notes xmlns:a="http://schemas.openxmlformats.org/drawingml/2006/main" xmlns:r="http://schemas.openxmlformats.org/officeDocument/2006/relationships" xmlns:p="http://schemas.openxmlformats.org/presentationml/2006/main">
+  <p:cSld>
+    <p:spTree>
+      <p:nvGrpSpPr>
+        <p:cNvPr id="1" name=""/>
+        <p:cNvGrpSpPr/>
+        <p:nvPr/>
+      </p:nvGrpSpPr>
+      <p:grpSpPr>
+        <a:xfrm>
+          <a:off x="0" y="0"/>
+          <a:ext cx="0" cy="0"/>
+          <a:chOff x="0" y="0"/>
+          <a:chExt cx="0" cy="0"/>
+        </a:xfrm>
+      </p:grpSpPr>
+      <p:sp>
+        <p:nvSpPr>
+          <p:cNvPr id="2" name="Segnaposto immagine diapositiva 1"/>
+          <p:cNvSpPr>
+            <a:spLocks noGrp="1" noRot="1" noChangeAspect="1"/>
+          </p:cNvSpPr>
+          <p:nvPr>
+            <p:ph type="sldImg"/>
+          </p:nvPr>
+        </p:nvSpPr>
+        <p:spPr/>
+      </p:sp>
+      <p:sp>
+        <p:nvSpPr>
+          <p:cNvPr id="3" name="Segnaposto note 2"/>
+          <p:cNvSpPr>
+            <a:spLocks noGrp="1"/>
+          </p:cNvSpPr>
+          <p:nvPr>
+            <p:ph type="body" idx="1"/>
+          </p:nvPr>
+        </p:nvSpPr>
+        <p:spPr/>
+        <p:txBody>
+          <a:bodyPr/>
+          <a:lstStyle/>
+          <a:p>
+            <a:r>
+              <a:rPr lang="it-IT" dirty="0"/>
+              <a:t>Un attore può avere più ruoli, per quello in chiave di clustering</a:t>
+            </a:r>
+          </a:p>
+        </p:txBody>
+      </p:sp>
+      <p:sp>
+        <p:nvSpPr>
+          <p:cNvPr id="4" name="Segnaposto numero diapositiva 3"/>
+          <p:cNvSpPr>
+            <a:spLocks noGrp="1"/>
+          </p:cNvSpPr>
+          <p:nvPr>
+            <p:ph type="sldNum" sz="quarter" idx="5"/>
+          </p:nvPr>
+        </p:nvSpPr>
+        <p:spPr/>
+        <p:txBody>
+          <a:bodyPr/>
+          <a:lstStyle/>
+          <a:p>
+            <a:fld id="{B38CEA09-33FA-4F6C-9D30-5FB0AA0E11C3}" type="slidenum">
+              <a:rPr lang="it-IT" smtClean="0"/>
+              <a:t>53</a:t>
+            </a:fld>
+            <a:endParaRPr lang="it-IT" dirty="0"/>
+          </a:p>
+        </p:txBody>
+      </p:sp>
+    </p:spTree>
+    <p:extLst>
+      <p:ext uri="{BB962C8B-B14F-4D97-AF65-F5344CB8AC3E}">
+        <p14:creationId xmlns:p14="http://schemas.microsoft.com/office/powerpoint/2010/main" val="1597129680"/>
+      </p:ext>
+    </p:extLst>
+  </p:cSld>
+  <p:clrMapOvr>
+    <a:masterClrMapping/>
+  </p:clrMapOvr>
+</p:notes>
+</file>
+
+<file path=ppt/notesSlides/notesSlide21.xml><?xml version="1.0" encoding="utf-8"?>
+<p:notes xmlns:a="http://schemas.openxmlformats.org/drawingml/2006/main" xmlns:r="http://schemas.openxmlformats.org/officeDocument/2006/relationships" xmlns:p="http://schemas.openxmlformats.org/presentationml/2006/main">
+  <p:cSld>
+    <p:spTree>
+      <p:nvGrpSpPr>
+        <p:cNvPr id="1" name=""/>
+        <p:cNvGrpSpPr/>
+        <p:nvPr/>
+      </p:nvGrpSpPr>
+      <p:grpSpPr>
+        <a:xfrm>
+          <a:off x="0" y="0"/>
+          <a:ext cx="0" cy="0"/>
+          <a:chOff x="0" y="0"/>
+          <a:chExt cx="0" cy="0"/>
+        </a:xfrm>
+      </p:grpSpPr>
+      <p:sp>
+        <p:nvSpPr>
+          <p:cNvPr id="2" name="Segnaposto immagine diapositiva 1"/>
+          <p:cNvSpPr>
+            <a:spLocks noGrp="1" noRot="1" noChangeAspect="1"/>
+          </p:cNvSpPr>
+          <p:nvPr>
+            <p:ph type="sldImg"/>
+          </p:nvPr>
+        </p:nvSpPr>
+        <p:spPr/>
+      </p:sp>
+      <p:sp>
+        <p:nvSpPr>
+          <p:cNvPr id="3" name="Segnaposto note 2"/>
+          <p:cNvSpPr>
+            <a:spLocks noGrp="1"/>
+          </p:cNvSpPr>
+          <p:nvPr>
+            <p:ph type="body" idx="1"/>
+          </p:nvPr>
+        </p:nvSpPr>
+        <p:spPr/>
+        <p:txBody>
+          <a:bodyPr/>
+          <a:lstStyle/>
+          <a:p>
+            <a:endParaRPr lang="it-IT" dirty="0"/>
+          </a:p>
+        </p:txBody>
+      </p:sp>
+      <p:sp>
+        <p:nvSpPr>
+          <p:cNvPr id="4" name="Segnaposto numero diapositiva 3"/>
+          <p:cNvSpPr>
+            <a:spLocks noGrp="1"/>
+          </p:cNvSpPr>
+          <p:nvPr>
+            <p:ph type="sldNum" sz="quarter" idx="10"/>
+          </p:nvPr>
+        </p:nvSpPr>
+        <p:spPr/>
+        <p:txBody>
+          <a:bodyPr/>
+          <a:lstStyle/>
+          <a:p>
+            <a:fld id="{B38CEA09-33FA-4F6C-9D30-5FB0AA0E11C3}" type="slidenum">
+              <a:rPr lang="it-IT" smtClean="0"/>
+              <a:t>55</a:t>
+            </a:fld>
+            <a:endParaRPr lang="it-IT" dirty="0"/>
+          </a:p>
+        </p:txBody>
+      </p:sp>
+    </p:spTree>
+    <p:extLst>
+      <p:ext uri="{BB962C8B-B14F-4D97-AF65-F5344CB8AC3E}">
+        <p14:creationId xmlns:p14="http://schemas.microsoft.com/office/powerpoint/2010/main" val="4204238383"/>
+      </p:ext>
+    </p:extLst>
+  </p:cSld>
+  <p:clrMapOvr>
+    <a:masterClrMapping/>
+  </p:clrMapOvr>
+</p:notes>
+</file>
+
+<file path=ppt/notesSlides/notesSlide22.xml><?xml version="1.0" encoding="utf-8"?>
+<p:notes xmlns:a="http://schemas.openxmlformats.org/drawingml/2006/main" xmlns:r="http://schemas.openxmlformats.org/officeDocument/2006/relationships" xmlns:p="http://schemas.openxmlformats.org/presentationml/2006/main">
+  <p:cSld>
+    <p:spTree>
+      <p:nvGrpSpPr>
+        <p:cNvPr id="1" name=""/>
+        <p:cNvGrpSpPr/>
+        <p:nvPr/>
+      </p:nvGrpSpPr>
+      <p:grpSpPr>
+        <a:xfrm>
+          <a:off x="0" y="0"/>
+          <a:ext cx="0" cy="0"/>
+          <a:chOff x="0" y="0"/>
+          <a:chExt cx="0" cy="0"/>
+        </a:xfrm>
+      </p:grpSpPr>
+      <p:sp>
+        <p:nvSpPr>
+          <p:cNvPr id="2" name="Segnaposto immagine diapositiva 1"/>
+          <p:cNvSpPr>
+            <a:spLocks noGrp="1" noRot="1" noChangeAspect="1"/>
+          </p:cNvSpPr>
+          <p:nvPr>
+            <p:ph type="sldImg"/>
+          </p:nvPr>
+        </p:nvSpPr>
+        <p:spPr/>
+      </p:sp>
+      <p:sp>
+        <p:nvSpPr>
+          <p:cNvPr id="3" name="Segnaposto note 2"/>
+          <p:cNvSpPr>
+            <a:spLocks noGrp="1"/>
+          </p:cNvSpPr>
+          <p:nvPr>
+            <p:ph type="body" idx="1"/>
+          </p:nvPr>
+        </p:nvSpPr>
+        <p:spPr/>
+        <p:txBody>
+          <a:bodyPr/>
+          <a:lstStyle/>
+          <a:p>
+            <a:endParaRPr lang="it-IT" dirty="0"/>
+          </a:p>
+        </p:txBody>
+      </p:sp>
+      <p:sp>
+        <p:nvSpPr>
+          <p:cNvPr id="4" name="Segnaposto numero diapositiva 3"/>
+          <p:cNvSpPr>
+            <a:spLocks noGrp="1"/>
+          </p:cNvSpPr>
+          <p:nvPr>
+            <p:ph type="sldNum" sz="quarter" idx="5"/>
+          </p:nvPr>
+        </p:nvSpPr>
+        <p:spPr/>
+        <p:txBody>
+          <a:bodyPr/>
+          <a:lstStyle/>
+          <a:p>
+            <a:fld id="{B38CEA09-33FA-4F6C-9D30-5FB0AA0E11C3}" type="slidenum">
+              <a:rPr lang="it-IT" smtClean="0"/>
+              <a:t>58</a:t>
+            </a:fld>
+            <a:endParaRPr lang="it-IT" dirty="0"/>
+          </a:p>
+        </p:txBody>
+      </p:sp>
+    </p:spTree>
+    <p:extLst>
+      <p:ext uri="{BB962C8B-B14F-4D97-AF65-F5344CB8AC3E}">
+        <p14:creationId xmlns:p14="http://schemas.microsoft.com/office/powerpoint/2010/main" val="2620946315"/>
       </p:ext>
     </p:extLst>
   </p:cSld>
@@ -2348,7 +2615,7 @@
             <a:spLocks noGrp="1"/>
           </p:cNvSpPr>
           <p:nvPr>
-            <p:ph type="sldNum" sz="quarter" idx="10"/>
+            <p:ph type="sldNum" sz="quarter" idx="5"/>
           </p:nvPr>
         </p:nvSpPr>
         <p:spPr/>
@@ -2358,7 +2625,7 @@
           <a:p>
             <a:fld id="{B38CEA09-33FA-4F6C-9D30-5FB0AA0E11C3}" type="slidenum">
               <a:rPr lang="it-IT" smtClean="0"/>
-              <a:t>14</a:t>
+              <a:t>9</a:t>
             </a:fld>
             <a:endParaRPr lang="it-IT" dirty="0"/>
           </a:p>
@@ -2367,7 +2634,7 @@
     </p:spTree>
     <p:extLst>
       <p:ext uri="{BB962C8B-B14F-4D97-AF65-F5344CB8AC3E}">
-        <p14:creationId xmlns:p14="http://schemas.microsoft.com/office/powerpoint/2010/main" val="1601900466"/>
+        <p14:creationId xmlns:p14="http://schemas.microsoft.com/office/powerpoint/2010/main" val="1032491102"/>
       </p:ext>
     </p:extLst>
   </p:cSld>
@@ -2421,10 +2688,7 @@
           <a:bodyPr/>
           <a:lstStyle/>
           <a:p>
-            <a:r>
-              <a:rPr lang="it-IT" dirty="0"/>
-              <a:t>Non mettere le parentesi fa si che non fanno parte entrambi di colonna di partizionamento</a:t>
-            </a:r>
+            <a:endParaRPr lang="it-IT" dirty="0"/>
           </a:p>
         </p:txBody>
       </p:sp>
@@ -2435,7 +2699,7 @@
             <a:spLocks noGrp="1"/>
           </p:cNvSpPr>
           <p:nvPr>
-            <p:ph type="sldNum" sz="quarter" idx="5"/>
+            <p:ph type="sldNum" sz="quarter" idx="10"/>
           </p:nvPr>
         </p:nvSpPr>
         <p:spPr/>
@@ -2445,7 +2709,7 @@
           <a:p>
             <a:fld id="{B38CEA09-33FA-4F6C-9D30-5FB0AA0E11C3}" type="slidenum">
               <a:rPr lang="it-IT" smtClean="0"/>
-              <a:t>17</a:t>
+              <a:t>14</a:t>
             </a:fld>
             <a:endParaRPr lang="it-IT" dirty="0"/>
           </a:p>
@@ -2454,7 +2718,7 @@
     </p:spTree>
     <p:extLst>
       <p:ext uri="{BB962C8B-B14F-4D97-AF65-F5344CB8AC3E}">
-        <p14:creationId xmlns:p14="http://schemas.microsoft.com/office/powerpoint/2010/main" val="3835903786"/>
+        <p14:creationId xmlns:p14="http://schemas.microsoft.com/office/powerpoint/2010/main" val="1601900466"/>
       </p:ext>
     </p:extLst>
   </p:cSld>
@@ -2508,10 +2772,7 @@
           <a:bodyPr/>
           <a:lstStyle/>
           <a:p>
-            <a:r>
-              <a:rPr lang="it-IT" dirty="0"/>
-              <a:t>Di default ordine ASC</a:t>
-            </a:r>
+            <a:endParaRPr lang="it-IT" dirty="0"/>
           </a:p>
         </p:txBody>
       </p:sp>
@@ -2532,7 +2793,7 @@
           <a:p>
             <a:fld id="{B38CEA09-33FA-4F6C-9D30-5FB0AA0E11C3}" type="slidenum">
               <a:rPr lang="it-IT" smtClean="0"/>
-              <a:t>24</a:t>
+              <a:t>15</a:t>
             </a:fld>
             <a:endParaRPr lang="it-IT" dirty="0"/>
           </a:p>
@@ -2541,7 +2802,7 @@
     </p:spTree>
     <p:extLst>
       <p:ext uri="{BB962C8B-B14F-4D97-AF65-F5344CB8AC3E}">
-        <p14:creationId xmlns:p14="http://schemas.microsoft.com/office/powerpoint/2010/main" val="1735177409"/>
+        <p14:creationId xmlns:p14="http://schemas.microsoft.com/office/powerpoint/2010/main" val="1604391751"/>
       </p:ext>
     </p:extLst>
   </p:cSld>
@@ -2597,15 +2858,7 @@
           <a:p>
             <a:r>
               <a:rPr lang="it-IT" dirty="0"/>
-              <a:t>Punto di partenza: ho un file </a:t>
-            </a:r>
-            <a:r>
-              <a:rPr lang="it-IT" dirty="0" err="1"/>
-              <a:t>csv</a:t>
-            </a:r>
-            <a:r>
-              <a:rPr lang="it-IT" dirty="0"/>
-              <a:t> con </a:t>
+              <a:t>Non mettere le parentesi fa si che non fanno parte entrambi di colonna di partizionamento</a:t>
             </a:r>
           </a:p>
         </p:txBody>
@@ -2617,7 +2870,7 @@
             <a:spLocks noGrp="1"/>
           </p:cNvSpPr>
           <p:nvPr>
-            <p:ph type="sldNum" sz="quarter" idx="10"/>
+            <p:ph type="sldNum" sz="quarter" idx="5"/>
           </p:nvPr>
         </p:nvSpPr>
         <p:spPr/>
@@ -2627,7 +2880,7 @@
           <a:p>
             <a:fld id="{B38CEA09-33FA-4F6C-9D30-5FB0AA0E11C3}" type="slidenum">
               <a:rPr lang="it-IT" smtClean="0"/>
-              <a:t>27</a:t>
+              <a:t>17</a:t>
             </a:fld>
             <a:endParaRPr lang="it-IT" dirty="0"/>
           </a:p>
@@ -2636,7 +2889,7 @@
     </p:spTree>
     <p:extLst>
       <p:ext uri="{BB962C8B-B14F-4D97-AF65-F5344CB8AC3E}">
-        <p14:creationId xmlns:p14="http://schemas.microsoft.com/office/powerpoint/2010/main" val="3749314019"/>
+        <p14:creationId xmlns:p14="http://schemas.microsoft.com/office/powerpoint/2010/main" val="3835903786"/>
       </p:ext>
     </p:extLst>
   </p:cSld>
@@ -2872,7 +3125,7 @@
           <a:p>
             <a:fld id="{65061730-2F0F-4B55-83F4-33856D80FFD7}" type="datetime1">
               <a:rPr lang="en-US" smtClean="0"/>
-              <a:t>2/17/2023</a:t>
+              <a:t>2/24/2025</a:t>
             </a:fld>
             <a:endParaRPr lang="en-US" dirty="0"/>
           </a:p>
@@ -3080,7 +3333,7 @@
           <a:p>
             <a:fld id="{BE1035D6-F845-4530-B289-DD4EC9CAE501}" type="datetime1">
               <a:rPr lang="en-US" smtClean="0"/>
-              <a:t>2/17/2023</a:t>
+              <a:t>2/24/2025</a:t>
             </a:fld>
             <a:endParaRPr lang="en-US" dirty="0"/>
           </a:p>
@@ -3336,7 +3589,7 @@
           <a:p>
             <a:fld id="{EDD3DE46-844C-40F1-AAA7-78AD6518D44C}" type="datetime1">
               <a:rPr lang="en-US" smtClean="0"/>
-              <a:t>2/17/2023</a:t>
+              <a:t>2/24/2025</a:t>
             </a:fld>
             <a:endParaRPr lang="en-US" dirty="0"/>
           </a:p>
@@ -3508,7 +3761,7 @@
           <a:p>
             <a:fld id="{1FCF7768-7A83-43C9-9C3D-95CD5F68D7E2}" type="datetime1">
               <a:rPr lang="en-US" smtClean="0"/>
-              <a:t>2/17/2023</a:t>
+              <a:t>2/24/2025</a:t>
             </a:fld>
             <a:endParaRPr lang="en-US" dirty="0"/>
           </a:p>
@@ -3851,7 +4104,7 @@
           <a:p>
             <a:fld id="{58DD30C4-1715-4BC2-976F-EF7BA4DC70B4}" type="datetime1">
               <a:rPr lang="en-US" smtClean="0"/>
-              <a:t>2/17/2023</a:t>
+              <a:t>2/24/2025</a:t>
             </a:fld>
             <a:endParaRPr lang="en-US" dirty="0"/>
           </a:p>
@@ -4126,7 +4379,7 @@
           <a:p>
             <a:fld id="{E92CF10C-564E-48D4-BE3A-05BB93A7F107}" type="datetime1">
               <a:rPr lang="en-US" smtClean="0"/>
-              <a:t>2/17/2023</a:t>
+              <a:t>2/24/2025</a:t>
             </a:fld>
             <a:endParaRPr lang="en-US" dirty="0"/>
           </a:p>
@@ -4505,7 +4758,7 @@
           <a:p>
             <a:fld id="{CEF5B9DB-33AD-46E7-ADFD-C52815BFEA09}" type="datetime1">
               <a:rPr lang="en-US" smtClean="0"/>
-              <a:t>2/17/2023</a:t>
+              <a:t>2/24/2025</a:t>
             </a:fld>
             <a:endParaRPr lang="en-US" dirty="0"/>
           </a:p>
@@ -4623,7 +4876,7 @@
           <a:p>
             <a:fld id="{EFC02824-932F-46A1-8D0D-D52979BEE663}" type="datetime1">
               <a:rPr lang="en-US" smtClean="0"/>
-              <a:t>2/17/2023</a:t>
+              <a:t>2/24/2025</a:t>
             </a:fld>
             <a:endParaRPr lang="en-US" dirty="0"/>
           </a:p>
@@ -4794,7 +5047,7 @@
           <a:p>
             <a:fld id="{36233CB2-1968-4F08-9AB4-83693145DE18}" type="datetime1">
               <a:rPr lang="en-US" smtClean="0"/>
-              <a:t>2/17/2023</a:t>
+              <a:t>2/24/2025</a:t>
             </a:fld>
             <a:endParaRPr lang="en-US" dirty="0"/>
           </a:p>
@@ -5149,7 +5402,7 @@
           <a:p>
             <a:fld id="{F8F6D7E5-1322-4764-A2E4-7B71FFFDE726}" type="datetime1">
               <a:rPr lang="en-US" smtClean="0"/>
-              <a:t>2/17/2023</a:t>
+              <a:t>2/24/2025</a:t>
             </a:fld>
             <a:endParaRPr lang="en-US" dirty="0"/>
           </a:p>
@@ -5527,7 +5780,7 @@
           <a:p>
             <a:fld id="{E26D0A1A-929F-4DC6-9A8A-74A15252C912}" type="datetime1">
               <a:rPr lang="en-US" smtClean="0"/>
-              <a:t>2/17/2023</a:t>
+              <a:t>2/24/2025</a:t>
             </a:fld>
             <a:endParaRPr lang="en-US" dirty="0"/>
           </a:p>
@@ -5814,7 +6067,7 @@
           <a:p>
             <a:fld id="{EDD3DE46-844C-40F1-AAA7-78AD6518D44C}" type="datetime1">
               <a:rPr lang="en-US" smtClean="0"/>
-              <a:t>2/17/2023</a:t>
+              <a:t>2/24/2025</a:t>
             </a:fld>
             <a:endParaRPr lang="en-US" dirty="0"/>
           </a:p>
@@ -10121,7 +10374,7 @@
           <p:nvPr/>
         </p:nvPicPr>
         <p:blipFill>
-          <a:blip r:embed="rId2"/>
+          <a:blip r:embed="rId3"/>
           <a:stretch>
             <a:fillRect/>
           </a:stretch>
@@ -20629,46 +20882,46 @@
           </a:p>
           <a:p>
             <a:r>
-              <a:rPr lang="en-US" dirty="0"/>
+              <a:rPr lang="en-US" u="sng" dirty="0"/>
               <a:t>Non </a:t>
             </a:r>
             <a:r>
-              <a:rPr lang="en-US" dirty="0" err="1"/>
+              <a:rPr lang="en-US" u="sng" dirty="0" err="1"/>
               <a:t>si</a:t>
             </a:r>
             <a:r>
-              <a:rPr lang="en-US" dirty="0"/>
-              <a:t> </a:t>
-            </a:r>
-            <a:r>
-              <a:rPr lang="en-US" dirty="0" err="1"/>
+              <a:rPr lang="en-US" u="sng" dirty="0"/>
+              <a:t> </a:t>
+            </a:r>
+            <a:r>
+              <a:rPr lang="en-US" u="sng" dirty="0" err="1"/>
               <a:t>può</a:t>
             </a:r>
             <a:r>
-              <a:rPr lang="en-US" dirty="0"/>
-              <a:t> </a:t>
-            </a:r>
-            <a:r>
-              <a:rPr lang="en-US" dirty="0" err="1"/>
+              <a:rPr lang="en-US" u="sng" dirty="0"/>
+              <a:t> </a:t>
+            </a:r>
+            <a:r>
+              <a:rPr lang="en-US" u="sng" dirty="0" err="1"/>
               <a:t>modificare</a:t>
             </a:r>
             <a:r>
-              <a:rPr lang="en-US" dirty="0"/>
+              <a:rPr lang="en-US" u="sng" dirty="0"/>
               <a:t> la </a:t>
             </a:r>
             <a:r>
-              <a:rPr lang="en-US" dirty="0" err="1"/>
+              <a:rPr lang="en-US" u="sng" dirty="0" err="1"/>
               <a:t>chiave</a:t>
             </a:r>
             <a:r>
-              <a:rPr lang="en-US" dirty="0"/>
-              <a:t> </a:t>
-            </a:r>
-            <a:r>
-              <a:rPr lang="en-US" dirty="0" err="1"/>
+              <a:rPr lang="en-US" u="sng" dirty="0"/>
+              <a:t> </a:t>
+            </a:r>
+            <a:r>
+              <a:rPr lang="en-US" u="sng" dirty="0" err="1"/>
               <a:t>primaria</a:t>
             </a:r>
-            <a:endParaRPr lang="en-US" dirty="0"/>
+            <a:endParaRPr lang="en-US" u="sng" dirty="0"/>
           </a:p>
         </p:txBody>
       </p:sp>
@@ -35798,12 +36051,9 @@
           <a:p>
             <a:r>
               <a:rPr lang="en-US" dirty="0" err="1"/>
-              <a:t>Esercizio</a:t>
-            </a:r>
-            <a:r>
-              <a:rPr lang="en-US" dirty="0"/>
-              <a:t> 3</a:t>
-            </a:r>
+              <a:t>Upsert</a:t>
+            </a:r>
+            <a:endParaRPr lang="en-US" dirty="0"/>
           </a:p>
         </p:txBody>
       </p:sp>
@@ -36332,6 +36582,325 @@
     <p:extLst>
       <p:ext uri="{BB962C8B-B14F-4D97-AF65-F5344CB8AC3E}">
         <p14:creationId xmlns:p14="http://schemas.microsoft.com/office/powerpoint/2010/main" val="2038506627"/>
+      </p:ext>
+    </p:extLst>
+  </p:cSld>
+  <p:clrMapOvr>
+    <a:masterClrMapping/>
+  </p:clrMapOvr>
+</p:sld>
+</file>
+
+<file path=ppt/slides/slide58.xml><?xml version="1.0" encoding="utf-8"?>
+<p:sld xmlns:a="http://schemas.openxmlformats.org/drawingml/2006/main" xmlns:r="http://schemas.openxmlformats.org/officeDocument/2006/relationships" xmlns:p="http://schemas.openxmlformats.org/presentationml/2006/main">
+  <p:cSld>
+    <p:spTree>
+      <p:nvGrpSpPr>
+        <p:cNvPr id="1" name=""/>
+        <p:cNvGrpSpPr/>
+        <p:nvPr/>
+      </p:nvGrpSpPr>
+      <p:grpSpPr>
+        <a:xfrm>
+          <a:off x="0" y="0"/>
+          <a:ext cx="0" cy="0"/>
+          <a:chOff x="0" y="0"/>
+          <a:chExt cx="0" cy="0"/>
+        </a:xfrm>
+      </p:grpSpPr>
+      <p:sp>
+        <p:nvSpPr>
+          <p:cNvPr id="2" name="Titolo 1">
+            <a:extLst>
+              <a:ext uri="{FF2B5EF4-FFF2-40B4-BE49-F238E27FC236}">
+                <a16:creationId xmlns:a16="http://schemas.microsoft.com/office/drawing/2014/main" id="{5C658E84-7C75-4DB8-A0C7-BDA65327FDE7}"/>
+              </a:ext>
+            </a:extLst>
+          </p:cNvPr>
+          <p:cNvSpPr>
+            <a:spLocks noGrp="1"/>
+          </p:cNvSpPr>
+          <p:nvPr>
+            <p:ph type="title"/>
+          </p:nvPr>
+        </p:nvSpPr>
+        <p:spPr/>
+        <p:txBody>
+          <a:bodyPr/>
+          <a:lstStyle/>
+          <a:p>
+            <a:r>
+              <a:rPr lang="it-IT" dirty="0"/>
+              <a:t>Esercizio finale</a:t>
+            </a:r>
+          </a:p>
+        </p:txBody>
+      </p:sp>
+      <p:sp>
+        <p:nvSpPr>
+          <p:cNvPr id="3" name="Segnaposto contenuto 2">
+            <a:extLst>
+              <a:ext uri="{FF2B5EF4-FFF2-40B4-BE49-F238E27FC236}">
+                <a16:creationId xmlns:a16="http://schemas.microsoft.com/office/drawing/2014/main" id="{90F9D510-76BC-465A-A868-E247C578B4F9}"/>
+              </a:ext>
+            </a:extLst>
+          </p:cNvPr>
+          <p:cNvSpPr>
+            <a:spLocks noGrp="1"/>
+          </p:cNvSpPr>
+          <p:nvPr>
+            <p:ph idx="1"/>
+          </p:nvPr>
+        </p:nvSpPr>
+        <p:spPr/>
+        <p:txBody>
+          <a:bodyPr>
+            <a:noAutofit/>
+          </a:bodyPr>
+          <a:lstStyle/>
+          <a:p>
+            <a:pPr marL="457200" indent="-457200">
+              <a:buFont typeface="+mj-lt"/>
+              <a:buAutoNum type="arabicPeriod"/>
+            </a:pPr>
+            <a:r>
+              <a:rPr lang="it-IT" dirty="0"/>
+              <a:t>Aprire lo script `/root/</a:t>
+            </a:r>
+            <a:r>
+              <a:rPr lang="it-IT" dirty="0" err="1"/>
+              <a:t>labwork</a:t>
+            </a:r>
+            <a:r>
+              <a:rPr lang="it-IT" dirty="0"/>
+              <a:t>/exercise-16/</a:t>
+            </a:r>
+            <a:r>
+              <a:rPr lang="it-IT" dirty="0" err="1"/>
+              <a:t>killrvideo.cql</a:t>
+            </a:r>
+            <a:r>
+              <a:rPr lang="it-IT" dirty="0"/>
+              <a:t>`. Nelle prime 4 tabelle, inserire il tipo di dato corretto al posto di "CQL TYPE".</a:t>
+            </a:r>
+          </a:p>
+          <a:p>
+            <a:pPr marL="457200" indent="-457200">
+              <a:buFont typeface="+mj-lt"/>
+              <a:buAutoNum type="arabicPeriod"/>
+            </a:pPr>
+            <a:r>
+              <a:rPr lang="it-IT" dirty="0"/>
+              <a:t>Eseguire lo script e popolare le tabelle</a:t>
+            </a:r>
+          </a:p>
+          <a:p>
+            <a:pPr marL="457200" indent="-457200">
+              <a:buFont typeface="+mj-lt"/>
+              <a:buAutoNum type="arabicPeriod"/>
+            </a:pPr>
+            <a:r>
+              <a:rPr lang="it-IT" dirty="0"/>
+              <a:t>Definire le seguenti query:</a:t>
+            </a:r>
+          </a:p>
+          <a:p>
+            <a:pPr marL="749808" lvl="1" indent="-457200">
+              <a:buFont typeface="+mj-lt"/>
+              <a:buAutoNum type="arabicPeriod"/>
+            </a:pPr>
+            <a:r>
+              <a:rPr lang="it-IT" sz="1600" dirty="0"/>
+              <a:t>Visualizzare i 50 video più recenti dalla tabella </a:t>
+            </a:r>
+            <a:r>
+              <a:rPr lang="it-IT" sz="1600" dirty="0" err="1"/>
+              <a:t>latest_videos</a:t>
+            </a:r>
+            <a:r>
+              <a:rPr lang="it-IT" sz="1600" dirty="0"/>
+              <a:t>. Cercare l'ID del film `</a:t>
+            </a:r>
+            <a:r>
+              <a:rPr lang="it-IT" sz="1600" dirty="0" err="1"/>
+              <a:t>Gone</a:t>
+            </a:r>
+            <a:r>
+              <a:rPr lang="it-IT" sz="1600" dirty="0"/>
+              <a:t> Girl` ("L'amore bugiardo")</a:t>
+            </a:r>
+          </a:p>
+          <a:p>
+            <a:pPr marL="749808" lvl="1" indent="-457200">
+              <a:buFont typeface="+mj-lt"/>
+              <a:buAutoNum type="arabicPeriod"/>
+            </a:pPr>
+            <a:r>
+              <a:rPr lang="it-IT" sz="1600" dirty="0"/>
+              <a:t>Visualizzare i dati del film dalla tabella `</a:t>
+            </a:r>
+            <a:r>
+              <a:rPr lang="it-IT" sz="1600" dirty="0" err="1"/>
+              <a:t>videos</a:t>
+            </a:r>
+            <a:r>
+              <a:rPr lang="it-IT" sz="1600" dirty="0"/>
+              <a:t>`. Quando è stato rilasciato il film? A quali generi appartiene?</a:t>
+            </a:r>
+          </a:p>
+          <a:p>
+            <a:pPr marL="749808" lvl="1" indent="-457200">
+              <a:buFont typeface="+mj-lt"/>
+              <a:buAutoNum type="arabicPeriod"/>
+            </a:pPr>
+            <a:r>
+              <a:rPr lang="it-IT" sz="1600" dirty="0"/>
+              <a:t>Visualizzare gli attori coinvolti nel film e i personaggi da loro interpretati dalla tabella `</a:t>
+            </a:r>
+            <a:r>
+              <a:rPr lang="it-IT" sz="1600" dirty="0" err="1"/>
+              <a:t>actors_by_video</a:t>
+            </a:r>
+            <a:r>
+              <a:rPr lang="it-IT" sz="1600" dirty="0"/>
+              <a:t>`. Quale attore ha interpretato il personaggio `Desi </a:t>
+            </a:r>
+            <a:r>
+              <a:rPr lang="it-IT" sz="1600" dirty="0" err="1"/>
+              <a:t>Collings</a:t>
+            </a:r>
+            <a:r>
+              <a:rPr lang="it-IT" sz="1600" dirty="0"/>
+              <a:t>`?</a:t>
+            </a:r>
+          </a:p>
+          <a:p>
+            <a:pPr marL="749808" lvl="1" indent="-457200">
+              <a:buFont typeface="+mj-lt"/>
+              <a:buAutoNum type="arabicPeriod"/>
+            </a:pPr>
+            <a:r>
+              <a:rPr lang="it-IT" sz="1600" dirty="0"/>
+              <a:t>Cercare il trailer del film dalla tabella `</a:t>
+            </a:r>
+            <a:r>
+              <a:rPr lang="it-IT" sz="1600" dirty="0" err="1"/>
+              <a:t>trailers_by_video</a:t>
+            </a:r>
+            <a:r>
+              <a:rPr lang="it-IT" sz="1600" dirty="0"/>
+              <a:t>`. Il </a:t>
+            </a:r>
+            <a:r>
+              <a:rPr lang="it-IT" sz="1600" dirty="0" err="1"/>
+              <a:t>trailer_id</a:t>
+            </a:r>
+            <a:r>
+              <a:rPr lang="it-IT" sz="1600" dirty="0"/>
+              <a:t> è un ID che riconduce alla tabella `</a:t>
+            </a:r>
+            <a:r>
+              <a:rPr lang="it-IT" sz="1600" dirty="0" err="1"/>
+              <a:t>videos</a:t>
+            </a:r>
+            <a:r>
+              <a:rPr lang="it-IT" sz="1600" dirty="0"/>
+              <a:t>`</a:t>
+            </a:r>
+          </a:p>
+          <a:p>
+            <a:pPr marL="749808" lvl="1" indent="-457200">
+              <a:buFont typeface="+mj-lt"/>
+              <a:buAutoNum type="arabicPeriod"/>
+            </a:pPr>
+            <a:r>
+              <a:rPr lang="it-IT" sz="1600" dirty="0"/>
+              <a:t>Visualizzare i dati del trailer dalla tabella `</a:t>
+            </a:r>
+            <a:r>
+              <a:rPr lang="it-IT" sz="1600" dirty="0" err="1"/>
+              <a:t>videos</a:t>
+            </a:r>
+            <a:r>
+              <a:rPr lang="it-IT" sz="1600" dirty="0"/>
+              <a:t>`</a:t>
+            </a:r>
+          </a:p>
+          <a:p>
+            <a:pPr marL="749808" lvl="1" indent="-457200">
+              <a:buFont typeface="+mj-lt"/>
+              <a:buAutoNum type="arabicPeriod"/>
+            </a:pPr>
+            <a:endParaRPr lang="it-IT" sz="1400" dirty="0"/>
+          </a:p>
+          <a:p>
+            <a:pPr marL="749808" lvl="1" indent="-457200">
+              <a:buFont typeface="+mj-lt"/>
+              <a:buAutoNum type="arabicPeriod"/>
+            </a:pPr>
+            <a:endParaRPr lang="it-IT" sz="2000" dirty="0"/>
+          </a:p>
+          <a:p>
+            <a:pPr marL="749808" lvl="1" indent="-457200">
+              <a:buFont typeface="+mj-lt"/>
+              <a:buAutoNum type="arabicPeriod"/>
+            </a:pPr>
+            <a:endParaRPr lang="it-IT" sz="2000" dirty="0"/>
+          </a:p>
+          <a:p>
+            <a:pPr marL="749808" lvl="1" indent="-457200">
+              <a:buFont typeface="+mj-lt"/>
+              <a:buAutoNum type="arabicPeriod"/>
+            </a:pPr>
+            <a:endParaRPr lang="it-IT" dirty="0"/>
+          </a:p>
+          <a:p>
+            <a:pPr marL="0" indent="0">
+              <a:buNone/>
+            </a:pPr>
+            <a:endParaRPr lang="it-IT" dirty="0"/>
+          </a:p>
+          <a:p>
+            <a:pPr marL="0" indent="0">
+              <a:buNone/>
+            </a:pPr>
+            <a:endParaRPr lang="it-IT" sz="1800" dirty="0"/>
+          </a:p>
+        </p:txBody>
+      </p:sp>
+      <p:sp>
+        <p:nvSpPr>
+          <p:cNvPr id="4" name="Segnaposto numero diapositiva 3">
+            <a:extLst>
+              <a:ext uri="{FF2B5EF4-FFF2-40B4-BE49-F238E27FC236}">
+                <a16:creationId xmlns:a16="http://schemas.microsoft.com/office/drawing/2014/main" id="{FB137B8E-9A3F-4DC1-9704-5EC070CE7CA7}"/>
+              </a:ext>
+            </a:extLst>
+          </p:cNvPr>
+          <p:cNvSpPr>
+            <a:spLocks noGrp="1"/>
+          </p:cNvSpPr>
+          <p:nvPr>
+            <p:ph type="sldNum" sz="quarter" idx="12"/>
+          </p:nvPr>
+        </p:nvSpPr>
+        <p:spPr/>
+        <p:txBody>
+          <a:bodyPr/>
+          <a:lstStyle/>
+          <a:p>
+            <a:fld id="{629637A9-119A-49DA-BD12-AAC58B377D80}" type="slidenum">
+              <a:rPr lang="en-US" smtClean="0"/>
+              <a:t>58</a:t>
+            </a:fld>
+            <a:endParaRPr lang="en-US" dirty="0"/>
+          </a:p>
+        </p:txBody>
+      </p:sp>
+    </p:spTree>
+    <p:extLst>
+      <p:ext uri="{BB962C8B-B14F-4D97-AF65-F5344CB8AC3E}">
+        <p14:creationId xmlns:p14="http://schemas.microsoft.com/office/powerpoint/2010/main" val="1070125974"/>
       </p:ext>
     </p:extLst>
   </p:cSld>
@@ -37250,7 +37819,7 @@
           <p:nvPr/>
         </p:nvPicPr>
         <p:blipFill>
-          <a:blip r:embed="rId2"/>
+          <a:blip r:embed="rId3"/>
           <a:stretch>
             <a:fillRect/>
           </a:stretch>
